--- a/output/education/2026-03-30_cognitive-bias-diagnostic-reasoning/cognitive-bias-diagnostic-reasoning_slides_allstaff.pptx
+++ b/output/education/2026-03-30_cognitive-bias-diagnostic-reasoning/cognitive-bias-diagnostic-reasoning_slides_allstaff.pptx
@@ -3381,42 +3381,6 @@
             <a:br/>
             <a:r>
               <a:t>今日のテーマ: 注意しましょうではなく仕組みで防ごう</a:t>
-            </a:r>
-          </a:p>
-        </p:txBody>
-      </p:sp>
-      <p:sp>
-        <p:nvSpPr>
-          <p:cNvPr id="9" name="TextBox 8"/>
-          <p:cNvSpPr txBox="1"/>
-          <p:nvPr/>
-        </p:nvSpPr>
-        <p:spPr>
-          <a:xfrm>
-            <a:off x="6400800" y="4663440"/>
-            <a:ext cx="2743200" cy="274320"/>
-          </a:xfrm>
-          <a:prstGeom prst="rect">
-            <a:avLst/>
-          </a:prstGeom>
-          <a:noFill/>
-        </p:spPr>
-        <p:txBody>
-          <a:bodyPr wrap="square" lIns="45720" rIns="45720" tIns="27432" bIns="27432">
-            <a:spAutoFit/>
-          </a:bodyPr>
-          <a:lstStyle/>
-          <a:p>
-            <a:pPr algn="l">
-              <a:defRPr sz="800" b="0">
-                <a:solidFill>
-                  <a:srgbClr val="9E8A7E"/>
-                </a:solidFill>
-                <a:latin typeface="Calibri"/>
-              </a:defRPr>
-            </a:pPr>
-            <a:r>
-              <a:t>[ガニェ事象1: 注意の獲得]</a:t>
             </a:r>
           </a:p>
         </p:txBody>
@@ -3980,42 +3944,6 @@
           </a:p>
         </p:txBody>
       </p:sp>
-      <p:sp>
-        <p:nvSpPr>
-          <p:cNvPr id="8" name="TextBox 7"/>
-          <p:cNvSpPr txBox="1"/>
-          <p:nvPr/>
-        </p:nvSpPr>
-        <p:spPr>
-          <a:xfrm>
-            <a:off x="5943600" y="4663440"/>
-            <a:ext cx="3200400" cy="274320"/>
-          </a:xfrm>
-          <a:prstGeom prst="rect">
-            <a:avLst/>
-          </a:prstGeom>
-          <a:noFill/>
-        </p:spPr>
-        <p:txBody>
-          <a:bodyPr wrap="square" lIns="45720" rIns="45720" tIns="27432" bIns="27432">
-            <a:spAutoFit/>
-          </a:bodyPr>
-          <a:lstStyle/>
-          <a:p>
-            <a:pPr algn="l">
-              <a:defRPr sz="800" b="0">
-                <a:solidFill>
-                  <a:srgbClr val="9E8A7E"/>
-                </a:solidFill>
-                <a:latin typeface="Calibri"/>
-              </a:defRPr>
-            </a:pPr>
-            <a:r>
-              <a:t>[ガニェ事象8: 評価 / 事象9: 保持と転移]</a:t>
-            </a:r>
-          </a:p>
-        </p:txBody>
-      </p:sp>
     </p:spTree>
   </p:cSld>
   <p:clrMapOvr>
@@ -4582,42 +4510,6 @@
             <a:br/>
             <a:r>
               <a:t>機能しているか振り返れる</a:t>
-            </a:r>
-          </a:p>
-        </p:txBody>
-      </p:sp>
-      <p:sp>
-        <p:nvSpPr>
-          <p:cNvPr id="16" name="TextBox 15"/>
-          <p:cNvSpPr txBox="1"/>
-          <p:nvPr/>
-        </p:nvSpPr>
-        <p:spPr>
-          <a:xfrm>
-            <a:off x="6400800" y="4663440"/>
-            <a:ext cx="2743200" cy="274320"/>
-          </a:xfrm>
-          <a:prstGeom prst="rect">
-            <a:avLst/>
-          </a:prstGeom>
-          <a:noFill/>
-        </p:spPr>
-        <p:txBody>
-          <a:bodyPr wrap="square" lIns="45720" rIns="45720" tIns="27432" bIns="27432">
-            <a:spAutoFit/>
-          </a:bodyPr>
-          <a:lstStyle/>
-          <a:p>
-            <a:pPr algn="l">
-              <a:defRPr sz="800" b="0">
-                <a:solidFill>
-                  <a:srgbClr val="9E8A7E"/>
-                </a:solidFill>
-                <a:latin typeface="Calibri"/>
-              </a:defRPr>
-            </a:pPr>
-            <a:r>
-              <a:t>[ガニェ事象2: 目標の提示]</a:t>
             </a:r>
           </a:p>
         </p:txBody>
@@ -5255,7 +5147,7 @@
         </p:nvSpPr>
         <p:spPr>
           <a:xfrm>
-            <a:off x="457200" y="3840480"/>
+            <a:off x="457200" y="4160520"/>
             <a:ext cx="54864" cy="640080"/>
           </a:xfrm>
           <a:prstGeom prst="rect">
@@ -5298,7 +5190,7 @@
         </p:nvSpPr>
         <p:spPr>
           <a:xfrm>
-            <a:off x="566928" y="3840480"/>
+            <a:off x="566928" y="4160520"/>
             <a:ext cx="8119872" cy="640080"/>
           </a:xfrm>
           <a:prstGeom prst="rect">
@@ -5343,7 +5235,7 @@
         </p:nvSpPr>
         <p:spPr>
           <a:xfrm>
-            <a:off x="685800" y="3913632"/>
+            <a:off x="685800" y="4233672"/>
             <a:ext cx="7863840" cy="493775"/>
           </a:xfrm>
           <a:prstGeom prst="rect">
@@ -5371,42 +5263,6 @@
             <a:br/>
             <a:r>
               <a:t>でも時々間違える — それが認知バイアス。誰にでも起きる。</a:t>
-            </a:r>
-          </a:p>
-        </p:txBody>
-      </p:sp>
-      <p:sp>
-        <p:nvSpPr>
-          <p:cNvPr id="8" name="TextBox 7"/>
-          <p:cNvSpPr txBox="1"/>
-          <p:nvPr/>
-        </p:nvSpPr>
-        <p:spPr>
-          <a:xfrm>
-            <a:off x="6400800" y="4663440"/>
-            <a:ext cx="2743200" cy="274320"/>
-          </a:xfrm>
-          <a:prstGeom prst="rect">
-            <a:avLst/>
-          </a:prstGeom>
-          <a:noFill/>
-        </p:spPr>
-        <p:txBody>
-          <a:bodyPr wrap="square" lIns="45720" rIns="45720" tIns="27432" bIns="27432">
-            <a:spAutoFit/>
-          </a:bodyPr>
-          <a:lstStyle/>
-          <a:p>
-            <a:pPr algn="l">
-              <a:defRPr sz="800" b="0">
-                <a:solidFill>
-                  <a:srgbClr val="9E8A7E"/>
-                </a:solidFill>
-                <a:latin typeface="Calibri"/>
-              </a:defRPr>
-            </a:pPr>
-            <a:r>
-              <a:t>[ガニェ事象3: 前提知識の想起]</a:t>
             </a:r>
           </a:p>
         </p:txBody>
@@ -6140,42 +5996,6 @@
             <a:br/>
             <a:r>
               <a:t>→ 確認省略でインシデント</a:t>
-            </a:r>
-          </a:p>
-        </p:txBody>
-      </p:sp>
-      <p:sp>
-        <p:nvSpPr>
-          <p:cNvPr id="20" name="TextBox 19"/>
-          <p:cNvSpPr txBox="1"/>
-          <p:nvPr/>
-        </p:nvSpPr>
-        <p:spPr>
-          <a:xfrm>
-            <a:off x="6400800" y="4663440"/>
-            <a:ext cx="2743200" cy="274320"/>
-          </a:xfrm>
-          <a:prstGeom prst="rect">
-            <a:avLst/>
-          </a:prstGeom>
-          <a:noFill/>
-        </p:spPr>
-        <p:txBody>
-          <a:bodyPr wrap="square" lIns="45720" rIns="45720" tIns="27432" bIns="27432">
-            <a:spAutoFit/>
-          </a:bodyPr>
-          <a:lstStyle/>
-          <a:p>
-            <a:pPr algn="l">
-              <a:defRPr sz="800" b="0">
-                <a:solidFill>
-                  <a:srgbClr val="9E8A7E"/>
-                </a:solidFill>
-                <a:latin typeface="Calibri"/>
-              </a:defRPr>
-            </a:pPr>
-            <a:r>
-              <a:t>[ガニェ事象4: 新しい内容を提示する]</a:t>
             </a:r>
           </a:p>
         </p:txBody>
@@ -6742,7 +6562,7 @@
         </p:nvSpPr>
         <p:spPr>
           <a:xfrm>
-            <a:off x="457200" y="3657600"/>
+            <a:off x="457200" y="3840480"/>
             <a:ext cx="8229600" cy="731520"/>
           </a:xfrm>
           <a:prstGeom prst="rect">
@@ -6785,7 +6605,7 @@
         </p:nvSpPr>
         <p:spPr>
           <a:xfrm>
-            <a:off x="640080" y="3703320"/>
+            <a:off x="640080" y="3886200"/>
             <a:ext cx="7772400" cy="640080"/>
           </a:xfrm>
           <a:prstGeom prst="rect">
@@ -6813,42 +6633,6 @@
             <a:br/>
             <a:r>
               <a:t>対策の基本: 意識的に遅い脳のスイッチを入れるタイミングを作る</a:t>
-            </a:r>
-          </a:p>
-        </p:txBody>
-      </p:sp>
-      <p:sp>
-        <p:nvSpPr>
-          <p:cNvPr id="7" name="TextBox 6"/>
-          <p:cNvSpPr txBox="1"/>
-          <p:nvPr/>
-        </p:nvSpPr>
-        <p:spPr>
-          <a:xfrm>
-            <a:off x="6400800" y="4663440"/>
-            <a:ext cx="2743200" cy="274320"/>
-          </a:xfrm>
-          <a:prstGeom prst="rect">
-            <a:avLst/>
-          </a:prstGeom>
-          <a:noFill/>
-        </p:spPr>
-        <p:txBody>
-          <a:bodyPr wrap="square" lIns="45720" rIns="45720" tIns="27432" bIns="27432">
-            <a:spAutoFit/>
-          </a:bodyPr>
-          <a:lstStyle/>
-          <a:p>
-            <a:pPr algn="l">
-              <a:defRPr sz="800" b="0">
-                <a:solidFill>
-                  <a:srgbClr val="9E8A7E"/>
-                </a:solidFill>
-                <a:latin typeface="Calibri"/>
-              </a:defRPr>
-            </a:pPr>
-            <a:r>
-              <a:t>[ガニェ事象5: 学習の指針を与える]</a:t>
             </a:r>
           </a:p>
         </p:txBody>
@@ -7909,42 +7693,6 @@
           </a:p>
         </p:txBody>
       </p:sp>
-      <p:sp>
-        <p:nvSpPr>
-          <p:cNvPr id="29" name="TextBox 28"/>
-          <p:cNvSpPr txBox="1"/>
-          <p:nvPr/>
-        </p:nvSpPr>
-        <p:spPr>
-          <a:xfrm>
-            <a:off x="6400800" y="4663440"/>
-            <a:ext cx="2743200" cy="274320"/>
-          </a:xfrm>
-          <a:prstGeom prst="rect">
-            <a:avLst/>
-          </a:prstGeom>
-          <a:noFill/>
-        </p:spPr>
-        <p:txBody>
-          <a:bodyPr wrap="square" lIns="45720" rIns="45720" tIns="27432" bIns="27432">
-            <a:spAutoFit/>
-          </a:bodyPr>
-          <a:lstStyle/>
-          <a:p>
-            <a:pPr algn="l">
-              <a:defRPr sz="800" b="0">
-                <a:solidFill>
-                  <a:srgbClr val="9E8A7E"/>
-                </a:solidFill>
-                <a:latin typeface="Calibri"/>
-              </a:defRPr>
-            </a:pPr>
-            <a:r>
-              <a:t>[ガニェ事象5: 学習の指針を与える]</a:t>
-            </a:r>
-          </a:p>
-        </p:txBody>
-      </p:sp>
     </p:spTree>
   </p:cSld>
   <p:clrMapOvr>
@@ -8470,42 +8218,6 @@
           </a:p>
         </p:txBody>
       </p:sp>
-      <p:sp>
-        <p:nvSpPr>
-          <p:cNvPr id="14" name="TextBox 13"/>
-          <p:cNvSpPr txBox="1"/>
-          <p:nvPr/>
-        </p:nvSpPr>
-        <p:spPr>
-          <a:xfrm>
-            <a:off x="6400800" y="4663440"/>
-            <a:ext cx="2743200" cy="274320"/>
-          </a:xfrm>
-          <a:prstGeom prst="rect">
-            <a:avLst/>
-          </a:prstGeom>
-          <a:noFill/>
-        </p:spPr>
-        <p:txBody>
-          <a:bodyPr wrap="square" lIns="45720" rIns="45720" tIns="27432" bIns="27432">
-            <a:spAutoFit/>
-          </a:bodyPr>
-          <a:lstStyle/>
-          <a:p>
-            <a:pPr algn="l">
-              <a:defRPr sz="800" b="0">
-                <a:solidFill>
-                  <a:srgbClr val="9E8A7E"/>
-                </a:solidFill>
-                <a:latin typeface="Calibri"/>
-              </a:defRPr>
-            </a:pPr>
-            <a:r>
-              <a:t>[ガニェ事象5: 学習の指針を与える]</a:t>
-            </a:r>
-          </a:p>
-        </p:txBody>
-      </p:sp>
     </p:spTree>
   </p:cSld>
   <p:clrMapOvr>
@@ -9005,42 +8717,6 @@
           </a:p>
         </p:txBody>
       </p:sp>
-      <p:sp>
-        <p:nvSpPr>
-          <p:cNvPr id="13" name="TextBox 12"/>
-          <p:cNvSpPr txBox="1"/>
-          <p:nvPr/>
-        </p:nvSpPr>
-        <p:spPr>
-          <a:xfrm>
-            <a:off x="6400800" y="4663440"/>
-            <a:ext cx="2743200" cy="274320"/>
-          </a:xfrm>
-          <a:prstGeom prst="rect">
-            <a:avLst/>
-          </a:prstGeom>
-          <a:noFill/>
-        </p:spPr>
-        <p:txBody>
-          <a:bodyPr wrap="square" lIns="45720" rIns="45720" tIns="27432" bIns="27432">
-            <a:spAutoFit/>
-          </a:bodyPr>
-          <a:lstStyle/>
-          <a:p>
-            <a:pPr algn="l">
-              <a:defRPr sz="800" b="0">
-                <a:solidFill>
-                  <a:srgbClr val="9E8A7E"/>
-                </a:solidFill>
-                <a:latin typeface="Calibri"/>
-              </a:defRPr>
-            </a:pPr>
-            <a:r>
-              <a:t>[ガニェ事象5: 学習の指針を与える]</a:t>
-            </a:r>
-          </a:p>
-        </p:txBody>
-      </p:sp>
     </p:spTree>
   </p:cSld>
   <p:clrMapOvr>
@@ -9535,42 +9211,6 @@
             <a:br/>
             <a:r>
               <a:t>小さなことでOK（申し送りの最後に「他にない？」を追加する等）</a:t>
-            </a:r>
-          </a:p>
-        </p:txBody>
-      </p:sp>
-      <p:sp>
-        <p:nvSpPr>
-          <p:cNvPr id="14" name="TextBox 13"/>
-          <p:cNvSpPr txBox="1"/>
-          <p:nvPr/>
-        </p:nvSpPr>
-        <p:spPr>
-          <a:xfrm>
-            <a:off x="5486400" y="4663440"/>
-            <a:ext cx="3657600" cy="274320"/>
-          </a:xfrm>
-          <a:prstGeom prst="rect">
-            <a:avLst/>
-          </a:prstGeom>
-          <a:noFill/>
-        </p:spPr>
-        <p:txBody>
-          <a:bodyPr wrap="square" lIns="45720" rIns="45720" tIns="27432" bIns="27432">
-            <a:spAutoFit/>
-          </a:bodyPr>
-          <a:lstStyle/>
-          <a:p>
-            <a:pPr algn="l">
-              <a:defRPr sz="800" b="0">
-                <a:solidFill>
-                  <a:srgbClr val="9E8A7E"/>
-                </a:solidFill>
-                <a:latin typeface="Calibri"/>
-              </a:defRPr>
-            </a:pPr>
-            <a:r>
-              <a:t>[ガニェ事象6: 練習 / 事象7: フィードバック]</a:t>
             </a:r>
           </a:p>
         </p:txBody>

--- a/output/education/2026-03-30_cognitive-bias-diagnostic-reasoning/cognitive-bias-diagnostic-reasoning_slides_allstaff.pptx
+++ b/output/education/2026-03-30_cognitive-bias-diagnostic-reasoning/cognitive-bias-diagnostic-reasoning_slides_allstaff.pptx
@@ -6115,7 +6115,7 @@
         </p:nvGraphicFramePr>
         <p:xfrm>
           <a:off x="274320" y="1005840"/>
-          <a:ext cx="8595360" cy="2743200"/>
+          <a:ext cx="8595360" cy="2468880"/>
         </p:xfrm>
         <a:graphic>
           <a:graphicData uri="http://schemas.openxmlformats.org/drawingml/2006/table">
@@ -6562,8 +6562,8 @@
         </p:nvSpPr>
         <p:spPr>
           <a:xfrm>
-            <a:off x="457200" y="3840480"/>
-            <a:ext cx="8229600" cy="731520"/>
+            <a:off x="457200" y="3657600"/>
+            <a:ext cx="8229600" cy="640080"/>
           </a:xfrm>
           <a:prstGeom prst="rect">
             <a:avLst/>
@@ -6605,8 +6605,8 @@
         </p:nvSpPr>
         <p:spPr>
           <a:xfrm>
-            <a:off x="640080" y="3886200"/>
-            <a:ext cx="7772400" cy="640080"/>
+            <a:off x="640080" y="3703320"/>
+            <a:ext cx="7772400" cy="548640"/>
           </a:xfrm>
           <a:prstGeom prst="rect">
             <a:avLst/>

--- a/output/education/2026-03-30_cognitive-bias-diagnostic-reasoning/cognitive-bias-diagnostic-reasoning_slides_allstaff.pptx
+++ b/output/education/2026-03-30_cognitive-bias-diagnostic-reasoning/cognitive-bias-diagnostic-reasoning_slides_allstaff.pptx
@@ -3136,10 +3136,12 @@
               </a:defRPr>
             </a:pPr>
             <a:r>
+              <a:rPr/>
               <a:t>なぜ優秀な人でも</a:t>
             </a:r>
             <a:br/>
             <a:r>
+              <a:rPr/>
               <a:t>判断を間違えるのか</a:t>
             </a:r>
           </a:p>
@@ -3184,7 +3186,9 @@
           <a:bodyPr rtlCol="0" anchor="ctr"/>
           <a:lstStyle/>
           <a:p>
-            <a:pPr algn="ctr"/>
+            <a:pPr algn="ctr">
+              <a:defRPr/>
+            </a:pPr>
           </a:p>
         </p:txBody>
       </p:sp>
@@ -3219,6 +3223,7 @@
               </a:defRPr>
             </a:pPr>
             <a:r>
+              <a:rPr/>
               <a:t>ベテラン医師が「完全に確信がある」と言った診断の40%が間違いだった</a:t>
             </a:r>
           </a:p>
@@ -3255,6 +3260,7 @@
               </a:defRPr>
             </a:pPr>
             <a:r>
+              <a:rPr/>
               <a:t>— これは能力の問題ではありません。脳の仕組みの問題です —</a:t>
             </a:r>
           </a:p>
@@ -3301,7 +3307,9 @@
           <a:bodyPr rtlCol="0" anchor="ctr"/>
           <a:lstStyle/>
           <a:p>
-            <a:pPr algn="ctr"/>
+            <a:pPr algn="ctr">
+              <a:defRPr/>
+            </a:pPr>
           </a:p>
         </p:txBody>
       </p:sp>
@@ -3314,7 +3322,7 @@
         <p:spPr>
           <a:xfrm>
             <a:off x="1097280" y="3063240"/>
-            <a:ext cx="6949440" cy="274320"/>
+            <a:ext cx="6949440" cy="301752"/>
           </a:xfrm>
           <a:prstGeom prst="rect">
             <a:avLst/>
@@ -3336,6 +3344,7 @@
               </a:defRPr>
             </a:pPr>
             <a:r>
+              <a:rPr/>
               <a:t>航空業界の教訓</a:t>
             </a:r>
           </a:p>
@@ -3372,14 +3381,17 @@
               </a:defRPr>
             </a:pPr>
             <a:r>
+              <a:rPr/>
               <a:t>パイロットのミスをヒューマンファクターとして再定義した結果、</a:t>
             </a:r>
             <a:br/>
             <a:r>
+              <a:rPr/>
               <a:t>航空事故は劇的に減少。医療でも同じアプローチが使える。</a:t>
             </a:r>
             <a:br/>
             <a:r>
+              <a:rPr/>
               <a:t>今日のテーマ: 注意しましょうではなく仕組みで防ごう</a:t>
             </a:r>
           </a:p>
@@ -3420,7 +3432,7 @@
         <p:spPr>
           <a:xfrm>
             <a:off x="457200" y="274320"/>
-            <a:ext cx="8229600" cy="457200"/>
+            <a:ext cx="8229600" cy="482600"/>
           </a:xfrm>
           <a:prstGeom prst="rect">
             <a:avLst/>
@@ -3442,6 +3454,7 @@
               </a:defRPr>
             </a:pPr>
             <a:r>
+              <a:rPr/>
               <a:t>明日からのアクション</a:t>
             </a:r>
           </a:p>
@@ -3486,7 +3499,9 @@
           <a:bodyPr rtlCol="0" anchor="ctr"/>
           <a:lstStyle/>
           <a:p>
-            <a:pPr algn="ctr"/>
+            <a:pPr algn="ctr">
+              <a:defRPr/>
+            </a:pPr>
           </a:p>
         </p:txBody>
       </p:sp>
@@ -3855,7 +3870,9 @@
           <a:bodyPr rtlCol="0" anchor="ctr"/>
           <a:lstStyle/>
           <a:p>
-            <a:pPr algn="ctr"/>
+            <a:pPr algn="ctr">
+              <a:defRPr/>
+            </a:pPr>
           </a:p>
         </p:txBody>
       </p:sp>
@@ -3900,7 +3917,9 @@
           <a:bodyPr rtlCol="0" anchor="ctr"/>
           <a:lstStyle/>
           <a:p>
-            <a:pPr algn="ctr"/>
+            <a:pPr algn="ctr">
+              <a:defRPr/>
+            </a:pPr>
           </a:p>
         </p:txBody>
       </p:sp>
@@ -3935,10 +3954,12 @@
               </a:defRPr>
             </a:pPr>
             <a:r>
+              <a:rPr/>
               <a:t>バイアスは脳の仕組み。だから気をつけるだけでは防げない。</a:t>
             </a:r>
             <a:br/>
             <a:r>
+              <a:rPr/>
               <a:t>仕組みで防ぐ。</a:t>
             </a:r>
           </a:p>
@@ -4001,6 +4022,7 @@
               </a:defRPr>
             </a:pPr>
             <a:r>
+              <a:rPr/>
               <a:t>この勉強会の後、あなたは以下ができるようになります</a:t>
             </a:r>
           </a:p>
@@ -4045,7 +4067,9 @@
           <a:bodyPr rtlCol="0" anchor="ctr"/>
           <a:lstStyle/>
           <a:p>
-            <a:pPr algn="ctr"/>
+            <a:pPr algn="ctr">
+              <a:defRPr/>
+            </a:pPr>
           </a:p>
         </p:txBody>
       </p:sp>
@@ -4088,7 +4112,9 @@
           <a:bodyPr rtlCol="0" anchor="ctr"/>
           <a:lstStyle/>
           <a:p>
-            <a:pPr algn="ctr"/>
+            <a:pPr algn="ctr">
+              <a:defRPr/>
+            </a:pPr>
           </a:p>
         </p:txBody>
       </p:sp>
@@ -4123,6 +4149,7 @@
               </a:defRPr>
             </a:pPr>
             <a:r>
+              <a:rPr/>
               <a:t>1</a:t>
             </a:r>
           </a:p>
@@ -4137,7 +4164,7 @@
         <p:spPr>
           <a:xfrm>
             <a:off x="1554480" y="1143000"/>
-            <a:ext cx="2743200" cy="274320"/>
+            <a:ext cx="2743200" cy="301752"/>
           </a:xfrm>
           <a:prstGeom prst="rect">
             <a:avLst/>
@@ -4159,6 +4186,7 @@
               </a:defRPr>
             </a:pPr>
             <a:r>
+              <a:rPr/>
               <a:t>説明できる</a:t>
             </a:r>
           </a:p>
@@ -4195,10 +4223,12 @@
               </a:defRPr>
             </a:pPr>
             <a:r>
+              <a:rPr/>
               <a:t>認知バイアスが「個人のミス」ではなく</a:t>
             </a:r>
             <a:br/>
             <a:r>
+              <a:rPr/>
               <a:t>「脳の仕組み」であることを説明できる</a:t>
             </a:r>
           </a:p>
@@ -4243,7 +4273,9 @@
           <a:bodyPr rtlCol="0" anchor="ctr"/>
           <a:lstStyle/>
           <a:p>
-            <a:pPr algn="ctr"/>
+            <a:pPr algn="ctr">
+              <a:defRPr/>
+            </a:pPr>
           </a:p>
         </p:txBody>
       </p:sp>
@@ -4278,6 +4310,7 @@
               </a:defRPr>
             </a:pPr>
             <a:r>
+              <a:rPr/>
               <a:t>2</a:t>
             </a:r>
           </a:p>
@@ -4292,7 +4325,7 @@
         <p:spPr>
           <a:xfrm>
             <a:off x="1554480" y="2331720"/>
-            <a:ext cx="2743200" cy="274320"/>
+            <a:ext cx="2743200" cy="301752"/>
           </a:xfrm>
           <a:prstGeom prst="rect">
             <a:avLst/>
@@ -4314,6 +4347,7 @@
               </a:defRPr>
             </a:pPr>
             <a:r>
+              <a:rPr/>
               <a:t>実践できる</a:t>
             </a:r>
           </a:p>
@@ -4350,10 +4384,12 @@
               </a:defRPr>
             </a:pPr>
             <a:r>
+              <a:rPr/>
               <a:t>日常業務で1つ、バイアスを防ぐ</a:t>
             </a:r>
             <a:br/>
             <a:r>
+              <a:rPr/>
               <a:t>具体的な方法を実践できる</a:t>
             </a:r>
           </a:p>
@@ -4398,7 +4434,9 @@
           <a:bodyPr rtlCol="0" anchor="ctr"/>
           <a:lstStyle/>
           <a:p>
-            <a:pPr algn="ctr"/>
+            <a:pPr algn="ctr">
+              <a:defRPr/>
+            </a:pPr>
           </a:p>
         </p:txBody>
       </p:sp>
@@ -4433,6 +4471,7 @@
               </a:defRPr>
             </a:pPr>
             <a:r>
+              <a:rPr/>
               <a:t>3</a:t>
             </a:r>
           </a:p>
@@ -4447,7 +4486,7 @@
         <p:spPr>
           <a:xfrm>
             <a:off x="1554480" y="3520439"/>
-            <a:ext cx="2743200" cy="274320"/>
+            <a:ext cx="2743200" cy="301753"/>
           </a:xfrm>
           <a:prstGeom prst="rect">
             <a:avLst/>
@@ -4469,6 +4508,7 @@
               </a:defRPr>
             </a:pPr>
             <a:r>
+              <a:rPr/>
               <a:t>評価できる</a:t>
             </a:r>
           </a:p>
@@ -4505,10 +4545,12 @@
               </a:defRPr>
             </a:pPr>
             <a:r>
+              <a:rPr/>
               <a:t>チームでの安全確認の仕組みが</a:t>
             </a:r>
             <a:br/>
             <a:r>
+              <a:rPr/>
               <a:t>機能しているか振り返れる</a:t>
             </a:r>
           </a:p>
@@ -4549,7 +4591,7 @@
         <p:spPr>
           <a:xfrm>
             <a:off x="457200" y="274320"/>
-            <a:ext cx="8229600" cy="457200"/>
+            <a:ext cx="8229600" cy="482600"/>
           </a:xfrm>
           <a:prstGeom prst="rect">
             <a:avLst/>
@@ -4571,6 +4613,7 @@
               </a:defRPr>
             </a:pPr>
             <a:r>
+              <a:rPr/>
               <a:t>速い脳と遅い脳</a:t>
             </a:r>
           </a:p>
@@ -4615,7 +4658,9 @@
           <a:bodyPr rtlCol="0" anchor="ctr"/>
           <a:lstStyle/>
           <a:p>
-            <a:pPr algn="ctr"/>
+            <a:pPr algn="ctr">
+              <a:defRPr/>
+            </a:pPr>
           </a:p>
         </p:txBody>
       </p:sp>
@@ -5178,7 +5223,9 @@
           <a:bodyPr rtlCol="0" anchor="ctr"/>
           <a:lstStyle/>
           <a:p>
-            <a:pPr algn="ctr"/>
+            <a:pPr algn="ctr">
+              <a:defRPr/>
+            </a:pPr>
           </a:p>
         </p:txBody>
       </p:sp>
@@ -5223,7 +5270,9 @@
           <a:bodyPr rtlCol="0" anchor="ctr"/>
           <a:lstStyle/>
           <a:p>
-            <a:pPr algn="ctr"/>
+            <a:pPr algn="ctr">
+              <a:defRPr/>
+            </a:pPr>
           </a:p>
         </p:txBody>
       </p:sp>
@@ -5258,10 +5307,12 @@
               </a:defRPr>
             </a:pPr>
             <a:r>
+              <a:rPr/>
               <a:t>速い脳は優秀 — 仕事の大半はこれで回っている。</a:t>
             </a:r>
             <a:br/>
             <a:r>
+              <a:rPr/>
               <a:t>でも時々間違える — それが認知バイアス。誰にでも起きる。</a:t>
             </a:r>
           </a:p>
@@ -5324,6 +5375,7 @@
               </a:defRPr>
             </a:pPr>
             <a:r>
+              <a:rPr/>
               <a:t>日常業務で起きるバイアス4つ</a:t>
             </a:r>
           </a:p>
@@ -5368,7 +5420,9 @@
           <a:bodyPr rtlCol="0" anchor="ctr"/>
           <a:lstStyle/>
           <a:p>
-            <a:pPr algn="ctr"/>
+            <a:pPr algn="ctr">
+              <a:defRPr/>
+            </a:pPr>
           </a:p>
         </p:txBody>
       </p:sp>
@@ -5413,7 +5467,9 @@
           <a:bodyPr rtlCol="0" anchor="ctr"/>
           <a:lstStyle/>
           <a:p>
-            <a:pPr algn="ctr"/>
+            <a:pPr algn="ctr">
+              <a:defRPr/>
+            </a:pPr>
           </a:p>
         </p:txBody>
       </p:sp>
@@ -5426,7 +5482,7 @@
         <p:spPr>
           <a:xfrm>
             <a:off x="411479" y="868680"/>
-            <a:ext cx="2286000" cy="274320"/>
+            <a:ext cx="2286000" cy="340360"/>
           </a:xfrm>
           <a:prstGeom prst="rect">
             <a:avLst/>
@@ -5448,6 +5504,7 @@
               </a:defRPr>
             </a:pPr>
             <a:r>
+              <a:rPr/>
               <a:t>確認バイアス</a:t>
             </a:r>
           </a:p>
@@ -5484,6 +5541,7 @@
               </a:defRPr>
             </a:pPr>
             <a:r>
+              <a:rPr/>
               <a:t>「思い込みメガネ」</a:t>
             </a:r>
           </a:p>
@@ -5520,10 +5578,12 @@
               </a:defRPr>
             </a:pPr>
             <a:r>
+              <a:rPr/>
               <a:t>「この患者さんはいつも大げさ」</a:t>
             </a:r>
             <a:br/>
             <a:r>
+              <a:rPr/>
               <a:t>→ 本当の痛みを聞き逃す</a:t>
             </a:r>
           </a:p>
@@ -5570,7 +5630,9 @@
           <a:bodyPr rtlCol="0" anchor="ctr"/>
           <a:lstStyle/>
           <a:p>
-            <a:pPr algn="ctr"/>
+            <a:pPr algn="ctr">
+              <a:defRPr/>
+            </a:pPr>
           </a:p>
         </p:txBody>
       </p:sp>
@@ -5583,7 +5645,7 @@
         <p:spPr>
           <a:xfrm>
             <a:off x="4800600" y="868680"/>
-            <a:ext cx="2286000" cy="274320"/>
+            <a:ext cx="2286000" cy="340360"/>
           </a:xfrm>
           <a:prstGeom prst="rect">
             <a:avLst/>
@@ -5605,6 +5667,7 @@
               </a:defRPr>
             </a:pPr>
             <a:r>
+              <a:rPr/>
               <a:t>アンカリング</a:t>
             </a:r>
           </a:p>
@@ -5641,6 +5704,7 @@
               </a:defRPr>
             </a:pPr>
             <a:r>
+              <a:rPr/>
               <a:t>「最初の情報に引きずられる」</a:t>
             </a:r>
           </a:p>
@@ -5677,10 +5741,12 @@
               </a:defRPr>
             </a:pPr>
             <a:r>
+              <a:rPr/>
               <a:t>申し送りで「発熱なし」</a:t>
             </a:r>
             <a:br/>
             <a:r>
+              <a:rPr/>
               <a:t>→ 37.8℃出ても大したことないと判断</a:t>
             </a:r>
           </a:p>
@@ -5727,7 +5793,9 @@
           <a:bodyPr rtlCol="0" anchor="ctr"/>
           <a:lstStyle/>
           <a:p>
-            <a:pPr algn="ctr"/>
+            <a:pPr algn="ctr">
+              <a:defRPr/>
+            </a:pPr>
           </a:p>
         </p:txBody>
       </p:sp>
@@ -5740,7 +5808,7 @@
         <p:spPr>
           <a:xfrm>
             <a:off x="411479" y="2880360"/>
-            <a:ext cx="2286000" cy="274320"/>
+            <a:ext cx="2286000" cy="340360"/>
           </a:xfrm>
           <a:prstGeom prst="rect">
             <a:avLst/>
@@ -5762,6 +5830,7 @@
               </a:defRPr>
             </a:pPr>
             <a:r>
+              <a:rPr/>
               <a:t>利用可能性</a:t>
             </a:r>
           </a:p>
@@ -5798,6 +5867,7 @@
               </a:defRPr>
             </a:pPr>
             <a:r>
+              <a:rPr/>
               <a:t>「最近の記憶に引っぱられる」</a:t>
             </a:r>
           </a:p>
@@ -5834,10 +5904,12 @@
               </a:defRPr>
             </a:pPr>
             <a:r>
+              <a:rPr/>
               <a:t>先週転倒事故があった</a:t>
             </a:r>
             <a:br/>
             <a:r>
+              <a:rPr/>
               <a:t>→ 転倒ばかり気にして他のリスクを見落とす</a:t>
             </a:r>
           </a:p>
@@ -5884,7 +5956,9 @@
           <a:bodyPr rtlCol="0" anchor="ctr"/>
           <a:lstStyle/>
           <a:p>
-            <a:pPr algn="ctr"/>
+            <a:pPr algn="ctr">
+              <a:defRPr/>
+            </a:pPr>
           </a:p>
         </p:txBody>
       </p:sp>
@@ -5897,7 +5971,7 @@
         <p:spPr>
           <a:xfrm>
             <a:off x="4800600" y="2880360"/>
-            <a:ext cx="2286000" cy="274320"/>
+            <a:ext cx="2286000" cy="340360"/>
           </a:xfrm>
           <a:prstGeom prst="rect">
             <a:avLst/>
@@ -5919,6 +5993,7 @@
               </a:defRPr>
             </a:pPr>
             <a:r>
+              <a:rPr/>
               <a:t>過信</a:t>
             </a:r>
           </a:p>
@@ -5955,6 +6030,7 @@
               </a:defRPr>
             </a:pPr>
             <a:r>
+              <a:rPr/>
               <a:t>「わかったつもり」</a:t>
             </a:r>
           </a:p>
@@ -5991,10 +6067,12 @@
               </a:defRPr>
             </a:pPr>
             <a:r>
+              <a:rPr/>
               <a:t>「この薬は何度も扱ったから大丈夫」</a:t>
             </a:r>
             <a:br/>
             <a:r>
+              <a:rPr/>
               <a:t>→ 確認省略でインシデント</a:t>
             </a:r>
           </a:p>
@@ -6035,7 +6113,7 @@
         <p:spPr>
           <a:xfrm>
             <a:off x="457200" y="274320"/>
-            <a:ext cx="8229600" cy="457200"/>
+            <a:ext cx="8229600" cy="482600"/>
           </a:xfrm>
           <a:prstGeom prst="rect">
             <a:avLst/>
@@ -6057,6 +6135,7 @@
               </a:defRPr>
             </a:pPr>
             <a:r>
+              <a:rPr/>
               <a:t>4つのバイアスまとめ</a:t>
             </a:r>
           </a:p>
@@ -6101,7 +6180,9 @@
           <a:bodyPr rtlCol="0" anchor="ctr"/>
           <a:lstStyle/>
           <a:p>
-            <a:pPr algn="ctr"/>
+            <a:pPr algn="ctr">
+              <a:defRPr/>
+            </a:pPr>
           </a:p>
         </p:txBody>
       </p:sp>
@@ -6593,7 +6674,9 @@
           <a:bodyPr rtlCol="0" anchor="ctr"/>
           <a:lstStyle/>
           <a:p>
-            <a:pPr algn="ctr"/>
+            <a:pPr algn="ctr">
+              <a:defRPr/>
+            </a:pPr>
           </a:p>
         </p:txBody>
       </p:sp>
@@ -6628,10 +6711,12 @@
               </a:defRPr>
             </a:pPr>
             <a:r>
+              <a:rPr/>
               <a:t>共通点: どれも速い脳の省エネモードが原因</a:t>
             </a:r>
             <a:br/>
             <a:r>
+              <a:rPr/>
               <a:t>対策の基本: 意識的に遅い脳のスイッチを入れるタイミングを作る</a:t>
             </a:r>
           </a:p>
@@ -6694,6 +6779,7 @@
               </a:defRPr>
             </a:pPr>
             <a:r>
+              <a:rPr/>
               <a:t>チームでバイアスを防ぐ — 5つの問い</a:t>
             </a:r>
           </a:p>
@@ -6738,7 +6824,9 @@
           <a:bodyPr rtlCol="0" anchor="ctr"/>
           <a:lstStyle/>
           <a:p>
-            <a:pPr algn="ctr"/>
+            <a:pPr algn="ctr">
+              <a:defRPr/>
+            </a:pPr>
           </a:p>
         </p:txBody>
       </p:sp>
@@ -6781,7 +6869,9 @@
           <a:bodyPr rtlCol="0" anchor="ctr"/>
           <a:lstStyle/>
           <a:p>
-            <a:pPr algn="ctr"/>
+            <a:pPr algn="ctr">
+              <a:defRPr/>
+            </a:pPr>
           </a:p>
         </p:txBody>
       </p:sp>
@@ -6794,7 +6884,7 @@
         <p:spPr>
           <a:xfrm>
             <a:off x="274320" y="868680"/>
-            <a:ext cx="548640" cy="365760"/>
+            <a:ext cx="548640" cy="411479"/>
           </a:xfrm>
           <a:prstGeom prst="rect">
             <a:avLst/>
@@ -6816,6 +6906,7 @@
               </a:defRPr>
             </a:pPr>
             <a:r>
+              <a:rPr/>
               <a:t>1</a:t>
             </a:r>
           </a:p>
@@ -6852,6 +6943,7 @@
               </a:defRPr>
             </a:pPr>
             <a:r>
+              <a:rPr/>
               <a:t>「他に何かない？」</a:t>
             </a:r>
           </a:p>
@@ -6888,6 +6980,7 @@
               </a:defRPr>
             </a:pPr>
             <a:r>
+              <a:rPr/>
               <a:t>確認バイアス対策</a:t>
             </a:r>
           </a:p>
@@ -6924,6 +7017,7 @@
               </a:defRPr>
             </a:pPr>
             <a:r>
+              <a:rPr/>
               <a:t>最初の判断以外の可能性を1つ考える</a:t>
             </a:r>
           </a:p>
@@ -6968,7 +7062,9 @@
           <a:bodyPr rtlCol="0" anchor="ctr"/>
           <a:lstStyle/>
           <a:p>
-            <a:pPr algn="ctr"/>
+            <a:pPr algn="ctr">
+              <a:defRPr/>
+            </a:pPr>
           </a:p>
         </p:txBody>
       </p:sp>
@@ -6981,7 +7077,7 @@
         <p:spPr>
           <a:xfrm>
             <a:off x="274320" y="1645920"/>
-            <a:ext cx="548640" cy="365760"/>
+            <a:ext cx="548640" cy="411479"/>
           </a:xfrm>
           <a:prstGeom prst="rect">
             <a:avLst/>
@@ -7003,6 +7099,7 @@
               </a:defRPr>
             </a:pPr>
             <a:r>
+              <a:rPr/>
               <a:t>2</a:t>
             </a:r>
           </a:p>
@@ -7039,10 +7136,12 @@
               </a:defRPr>
             </a:pPr>
             <a:r>
+              <a:rPr/>
               <a:t>「最初の印象に</a:t>
             </a:r>
             <a:br/>
             <a:r>
+              <a:rPr/>
               <a:t>引きずられてない？」</a:t>
             </a:r>
           </a:p>
@@ -7079,6 +7178,7 @@
               </a:defRPr>
             </a:pPr>
             <a:r>
+              <a:rPr/>
               <a:t>アンカリング対策</a:t>
             </a:r>
           </a:p>
@@ -7115,6 +7215,7 @@
               </a:defRPr>
             </a:pPr>
             <a:r>
+              <a:rPr/>
               <a:t>前の情報をリセットして見直す</a:t>
             </a:r>
           </a:p>
@@ -7159,7 +7260,9 @@
           <a:bodyPr rtlCol="0" anchor="ctr"/>
           <a:lstStyle/>
           <a:p>
-            <a:pPr algn="ctr"/>
+            <a:pPr algn="ctr">
+              <a:defRPr/>
+            </a:pPr>
           </a:p>
         </p:txBody>
       </p:sp>
@@ -7172,7 +7275,7 @@
         <p:spPr>
           <a:xfrm>
             <a:off x="274320" y="2423160"/>
-            <a:ext cx="548640" cy="365760"/>
+            <a:ext cx="548640" cy="411479"/>
           </a:xfrm>
           <a:prstGeom prst="rect">
             <a:avLst/>
@@ -7194,6 +7297,7 @@
               </a:defRPr>
             </a:pPr>
             <a:r>
+              <a:rPr/>
               <a:t>3</a:t>
             </a:r>
           </a:p>
@@ -7230,10 +7334,12 @@
               </a:defRPr>
             </a:pPr>
             <a:r>
+              <a:rPr/>
               <a:t>「最近の経験に</a:t>
             </a:r>
             <a:br/>
             <a:r>
+              <a:rPr/>
               <a:t>影響されてない？」</a:t>
             </a:r>
           </a:p>
@@ -7270,6 +7376,7 @@
               </a:defRPr>
             </a:pPr>
             <a:r>
+              <a:rPr/>
               <a:t>利用可能性対策</a:t>
             </a:r>
           </a:p>
@@ -7283,7 +7390,7 @@
         </p:nvSpPr>
         <p:spPr>
           <a:xfrm>
-            <a:off x="4389120" y="2606039"/>
+            <a:off x="4389120" y="2624327"/>
             <a:ext cx="4389120" cy="274320"/>
           </a:xfrm>
           <a:prstGeom prst="rect">
@@ -7306,6 +7413,7 @@
               </a:defRPr>
             </a:pPr>
             <a:r>
+              <a:rPr/>
               <a:t>先週の出来事と今回は別物</a:t>
             </a:r>
           </a:p>
@@ -7350,7 +7458,9 @@
           <a:bodyPr rtlCol="0" anchor="ctr"/>
           <a:lstStyle/>
           <a:p>
-            <a:pPr algn="ctr"/>
+            <a:pPr algn="ctr">
+              <a:defRPr/>
+            </a:pPr>
           </a:p>
         </p:txBody>
       </p:sp>
@@ -7363,7 +7473,7 @@
         <p:spPr>
           <a:xfrm>
             <a:off x="274320" y="3200400"/>
-            <a:ext cx="548640" cy="365760"/>
+            <a:ext cx="548640" cy="411479"/>
           </a:xfrm>
           <a:prstGeom prst="rect">
             <a:avLst/>
@@ -7385,6 +7495,7 @@
               </a:defRPr>
             </a:pPr>
             <a:r>
+              <a:rPr/>
               <a:t>4</a:t>
             </a:r>
           </a:p>
@@ -7421,10 +7532,12 @@
               </a:defRPr>
             </a:pPr>
             <a:r>
+              <a:rPr/>
               <a:t>「どれくらい確信がある？</a:t>
             </a:r>
             <a:br/>
             <a:r>
+              <a:rPr/>
               <a:t>根拠は？」</a:t>
             </a:r>
           </a:p>
@@ -7461,6 +7574,7 @@
               </a:defRPr>
             </a:pPr>
             <a:r>
+              <a:rPr/>
               <a:t>過信対策</a:t>
             </a:r>
           </a:p>
@@ -7474,7 +7588,7 @@
         </p:nvSpPr>
         <p:spPr>
           <a:xfrm>
-            <a:off x="4389120" y="3383279"/>
+            <a:off x="4389120" y="3401568"/>
             <a:ext cx="4389120" cy="274320"/>
           </a:xfrm>
           <a:prstGeom prst="rect">
@@ -7497,6 +7611,7 @@
               </a:defRPr>
             </a:pPr>
             <a:r>
+              <a:rPr/>
               <a:t>なんとなく大丈夫を言語化</a:t>
             </a:r>
           </a:p>
@@ -7541,7 +7656,9 @@
           <a:bodyPr rtlCol="0" anchor="ctr"/>
           <a:lstStyle/>
           <a:p>
-            <a:pPr algn="ctr"/>
+            <a:pPr algn="ctr">
+              <a:defRPr/>
+            </a:pPr>
           </a:p>
         </p:txBody>
       </p:sp>
@@ -7554,7 +7671,7 @@
         <p:spPr>
           <a:xfrm>
             <a:off x="274320" y="3977639"/>
-            <a:ext cx="548640" cy="365760"/>
+            <a:ext cx="548640" cy="411479"/>
           </a:xfrm>
           <a:prstGeom prst="rect">
             <a:avLst/>
@@ -7576,6 +7693,7 @@
               </a:defRPr>
             </a:pPr>
             <a:r>
+              <a:rPr/>
               <a:t>5</a:t>
             </a:r>
           </a:p>
@@ -7612,10 +7730,12 @@
               </a:defRPr>
             </a:pPr>
             <a:r>
+              <a:rPr/>
               <a:t>「もし間違っていたら、</a:t>
             </a:r>
             <a:br/>
             <a:r>
+              <a:rPr/>
               <a:t>一番ありそうな理由は？」</a:t>
             </a:r>
           </a:p>
@@ -7652,6 +7772,7 @@
               </a:defRPr>
             </a:pPr>
             <a:r>
+              <a:rPr/>
               <a:t>総合チェック</a:t>
             </a:r>
           </a:p>
@@ -7688,6 +7809,7 @@
               </a:defRPr>
             </a:pPr>
             <a:r>
+              <a:rPr/>
               <a:t>最悪のケースを先に想像する</a:t>
             </a:r>
           </a:p>
@@ -7728,7 +7850,7 @@
         <p:spPr>
           <a:xfrm>
             <a:off x="457200" y="274320"/>
-            <a:ext cx="8229600" cy="457200"/>
+            <a:ext cx="8229600" cy="482600"/>
           </a:xfrm>
           <a:prstGeom prst="rect">
             <a:avLst/>
@@ -7750,6 +7872,7 @@
               </a:defRPr>
             </a:pPr>
             <a:r>
+              <a:rPr/>
               <a:t>ダブルチェックの本当の意味</a:t>
             </a:r>
           </a:p>
@@ -7794,7 +7917,9 @@
           <a:bodyPr rtlCol="0" anchor="ctr"/>
           <a:lstStyle/>
           <a:p>
-            <a:pPr algn="ctr"/>
+            <a:pPr algn="ctr">
+              <a:defRPr/>
+            </a:pPr>
           </a:p>
         </p:txBody>
       </p:sp>
@@ -7837,7 +7962,9 @@
           <a:bodyPr rtlCol="0" anchor="ctr"/>
           <a:lstStyle/>
           <a:p>
-            <a:pPr algn="ctr"/>
+            <a:pPr algn="ctr">
+              <a:defRPr/>
+            </a:pPr>
           </a:p>
         </p:txBody>
       </p:sp>
@@ -7882,7 +8009,9 @@
           <a:bodyPr rtlCol="0" anchor="ctr"/>
           <a:lstStyle/>
           <a:p>
-            <a:pPr algn="ctr"/>
+            <a:pPr algn="ctr">
+              <a:defRPr/>
+            </a:pPr>
           </a:p>
         </p:txBody>
       </p:sp>
@@ -7917,10 +8046,12 @@
               </a:defRPr>
             </a:pPr>
             <a:r>
+              <a:rPr/>
               <a:t>ダブルチェックは「2回確認すること」ではありません。</a:t>
             </a:r>
             <a:br/>
             <a:r>
+              <a:rPr/>
               <a:t>「別の視点で確認すること」です。</a:t>
             </a:r>
           </a:p>
@@ -7967,7 +8098,9 @@
           <a:bodyPr rtlCol="0" anchor="ctr"/>
           <a:lstStyle/>
           <a:p>
-            <a:pPr algn="ctr"/>
+            <a:pPr algn="ctr">
+              <a:defRPr/>
+            </a:pPr>
           </a:p>
         </p:txBody>
       </p:sp>
@@ -7980,7 +8113,7 @@
         <p:spPr>
           <a:xfrm>
             <a:off x="640080" y="2148840"/>
-            <a:ext cx="3657600" cy="274320"/>
+            <a:ext cx="3657600" cy="301752"/>
           </a:xfrm>
           <a:prstGeom prst="rect">
             <a:avLst/>
@@ -8002,6 +8135,7 @@
               </a:defRPr>
             </a:pPr>
             <a:r>
+              <a:rPr/>
               <a:t>形骸化しやすいパターン</a:t>
             </a:r>
           </a:p>
@@ -8038,18 +8172,22 @@
               </a:defRPr>
             </a:pPr>
             <a:r>
+              <a:rPr/>
               <a:t>× 同じ人が2回見る</a:t>
             </a:r>
             <a:br/>
             <a:r>
+              <a:rPr/>
               <a:t>  → 同じバイアスが2回働くだけ</a:t>
             </a:r>
             <a:br/>
             <a:r>
+              <a:rPr/>
               <a:t>× 確認しましたにサインするだけ</a:t>
             </a:r>
             <a:br/>
             <a:r>
+              <a:rPr/>
               <a:t>  → チェックリスト疲れ</a:t>
             </a:r>
           </a:p>
@@ -8094,7 +8232,9 @@
           <a:bodyPr rtlCol="0" anchor="ctr"/>
           <a:lstStyle/>
           <a:p>
-            <a:pPr algn="ctr"/>
+            <a:pPr algn="ctr">
+              <a:defRPr/>
+            </a:pPr>
           </a:p>
         </p:txBody>
       </p:sp>
@@ -8107,7 +8247,7 @@
         <p:spPr>
           <a:xfrm>
             <a:off x="4937760" y="2148840"/>
-            <a:ext cx="3657600" cy="274320"/>
+            <a:ext cx="3657600" cy="301752"/>
           </a:xfrm>
           <a:prstGeom prst="rect">
             <a:avLst/>
@@ -8129,6 +8269,7 @@
               </a:defRPr>
             </a:pPr>
             <a:r>
+              <a:rPr/>
               <a:t>効果的なダブルチェック</a:t>
             </a:r>
           </a:p>
@@ -8165,18 +8306,22 @@
               </a:defRPr>
             </a:pPr>
             <a:r>
+              <a:rPr/>
               <a:t>○ 別の人が独立して確認する</a:t>
             </a:r>
             <a:br/>
             <a:r>
+              <a:rPr/>
               <a:t>○ 何を確認するかを明確にする</a:t>
             </a:r>
             <a:br/>
             <a:r>
+              <a:rPr/>
               <a:t>○ おかしいと思ったら声を出す</a:t>
             </a:r>
             <a:br/>
             <a:r>
+              <a:rPr/>
               <a:t>○ Devil's Advocate（反論する役）</a:t>
             </a:r>
           </a:p>
@@ -8191,7 +8336,7 @@
         <p:spPr>
           <a:xfrm>
             <a:off x="457200" y="3840480"/>
-            <a:ext cx="8229600" cy="274320"/>
+            <a:ext cx="8229600" cy="304799"/>
           </a:xfrm>
           <a:prstGeom prst="rect">
             <a:avLst/>
@@ -8213,6 +8358,7 @@
               </a:defRPr>
             </a:pPr>
             <a:r>
+              <a:rPr/>
               <a:t>Devil's Advocateは批判ではなく安全の仕組み</a:t>
             </a:r>
           </a:p>
@@ -8253,7 +8399,7 @@
         <p:spPr>
           <a:xfrm>
             <a:off x="457200" y="274320"/>
-            <a:ext cx="8229600" cy="457200"/>
+            <a:ext cx="8229600" cy="482600"/>
           </a:xfrm>
           <a:prstGeom prst="rect">
             <a:avLst/>
@@ -8275,6 +8421,7 @@
               </a:defRPr>
             </a:pPr>
             <a:r>
+              <a:rPr/>
               <a:t>「自分もバイアスを持つ」= 強さ</a:t>
             </a:r>
           </a:p>
@@ -8319,7 +8466,9 @@
           <a:bodyPr rtlCol="0" anchor="ctr"/>
           <a:lstStyle/>
           <a:p>
-            <a:pPr algn="ctr"/>
+            <a:pPr algn="ctr">
+              <a:defRPr/>
+            </a:pPr>
           </a:p>
         </p:txBody>
       </p:sp>
@@ -8362,7 +8511,9 @@
           <a:bodyPr rtlCol="0" anchor="ctr"/>
           <a:lstStyle/>
           <a:p>
-            <a:pPr algn="ctr"/>
+            <a:pPr algn="ctr">
+              <a:defRPr/>
+            </a:pPr>
           </a:p>
         </p:txBody>
       </p:sp>
@@ -8407,7 +8558,9 @@
           <a:bodyPr rtlCol="0" anchor="ctr"/>
           <a:lstStyle/>
           <a:p>
-            <a:pPr algn="ctr"/>
+            <a:pPr algn="ctr">
+              <a:defRPr/>
+            </a:pPr>
           </a:p>
         </p:txBody>
       </p:sp>
@@ -8442,10 +8595,12 @@
               </a:defRPr>
             </a:pPr>
             <a:r>
+              <a:rPr/>
               <a:t>バイアスがあることは恥ずかしいことではありません。</a:t>
             </a:r>
             <a:br/>
             <a:r>
+              <a:rPr/>
               <a:t>バイアスに気づける力こそが、プロフェッショナルの証です。</a:t>
             </a:r>
           </a:p>
@@ -8492,7 +8647,9 @@
           <a:bodyPr rtlCol="0" anchor="ctr"/>
           <a:lstStyle/>
           <a:p>
-            <a:pPr algn="ctr"/>
+            <a:pPr algn="ctr">
+              <a:defRPr/>
+            </a:pPr>
           </a:p>
         </p:txBody>
       </p:sp>
@@ -8505,7 +8662,7 @@
         <p:spPr>
           <a:xfrm>
             <a:off x="640080" y="2057400"/>
-            <a:ext cx="3657600" cy="274320"/>
+            <a:ext cx="3657600" cy="301752"/>
           </a:xfrm>
           <a:prstGeom prst="rect">
             <a:avLst/>
@@ -8527,6 +8684,7 @@
               </a:defRPr>
             </a:pPr>
             <a:r>
+              <a:rPr/>
               <a:t>メタ認知とは</a:t>
             </a:r>
           </a:p>
@@ -8563,22 +8721,27 @@
               </a:defRPr>
             </a:pPr>
             <a:r>
+              <a:rPr/>
               <a:t>自分の考え方について考えること</a:t>
             </a:r>
             <a:br/>
             <a:r>
+              <a:rPr/>
               <a:t>バイアスを認められる人 = </a:t>
             </a:r>
             <a:br/>
             <a:r>
+              <a:rPr/>
               <a:t>メタ認知能力が高い人</a:t>
             </a:r>
             <a:br/>
             <a:r>
+              <a:rPr/>
               <a:t>思い込みで判断してたかもと</a:t>
             </a:r>
             <a:br/>
             <a:r>
+              <a:rPr/>
               <a:t>言えるチーム = 心理的安全性が高い</a:t>
             </a:r>
           </a:p>
@@ -8625,7 +8788,9 @@
           <a:bodyPr rtlCol="0" anchor="ctr"/>
           <a:lstStyle/>
           <a:p>
-            <a:pPr algn="ctr"/>
+            <a:pPr algn="ctr">
+              <a:defRPr/>
+            </a:pPr>
           </a:p>
         </p:txBody>
       </p:sp>
@@ -8638,7 +8803,7 @@
         <p:spPr>
           <a:xfrm>
             <a:off x="4937760" y="2057400"/>
-            <a:ext cx="3657600" cy="274320"/>
+            <a:ext cx="3657600" cy="301752"/>
           </a:xfrm>
           <a:prstGeom prst="rect">
             <a:avLst/>
@@ -8660,6 +8825,7 @@
               </a:defRPr>
             </a:pPr>
             <a:r>
+              <a:rPr/>
               <a:t>航空業界の文化転換</a:t>
             </a:r>
           </a:p>
@@ -8696,22 +8862,27 @@
               </a:defRPr>
             </a:pPr>
             <a:r>
+              <a:rPr/>
               <a:t>昔:「機長に逆らうな」→ 多くの事故</a:t>
             </a:r>
             <a:br/>
             <a:r>
+              <a:rPr/>
               <a:t>今:「おかしいと思ったら声を上げる」</a:t>
             </a:r>
             <a:br/>
             <a:r>
+              <a:rPr/>
               <a:t>→ 事故激減</a:t>
             </a:r>
             <a:br/>
             <a:r>
+              <a:rPr/>
               <a:t>CRM（Crew Resource Management）</a:t>
             </a:r>
             <a:br/>
             <a:r>
+              <a:rPr/>
               <a:t>= チーム全体で安全を守る仕組み</a:t>
             </a:r>
           </a:p>
@@ -8774,6 +8945,7 @@
               </a:defRPr>
             </a:pPr>
             <a:r>
+              <a:rPr/>
               <a:t>グループワーク — うちのチームでできること</a:t>
             </a:r>
           </a:p>
@@ -8818,7 +8990,9 @@
           <a:bodyPr rtlCol="0" anchor="ctr"/>
           <a:lstStyle/>
           <a:p>
-            <a:pPr algn="ctr"/>
+            <a:pPr algn="ctr">
+              <a:defRPr/>
+            </a:pPr>
           </a:p>
         </p:txBody>
       </p:sp>
@@ -8831,7 +9005,7 @@
         <p:spPr>
           <a:xfrm>
             <a:off x="457200" y="1005840"/>
-            <a:ext cx="8229600" cy="274320"/>
+            <a:ext cx="8229600" cy="340360"/>
           </a:xfrm>
           <a:prstGeom prst="rect">
             <a:avLst/>
@@ -8853,6 +9027,7 @@
               </a:defRPr>
             </a:pPr>
             <a:r>
+              <a:rPr/>
               <a:t>ワーク（5分）: 3-4人グループで</a:t>
             </a:r>
           </a:p>
@@ -8897,7 +9072,9 @@
           <a:bodyPr rtlCol="0" anchor="ctr"/>
           <a:lstStyle/>
           <a:p>
-            <a:pPr algn="ctr"/>
+            <a:pPr algn="ctr">
+              <a:defRPr/>
+            </a:pPr>
           </a:p>
         </p:txBody>
       </p:sp>
@@ -8942,7 +9119,9 @@
           <a:bodyPr rtlCol="0" anchor="ctr"/>
           <a:lstStyle/>
           <a:p>
-            <a:pPr algn="ctr"/>
+            <a:pPr algn="ctr">
+              <a:defRPr/>
+            </a:pPr>
           </a:p>
         </p:txBody>
       </p:sp>
@@ -8977,10 +9156,12 @@
               </a:defRPr>
             </a:pPr>
             <a:r>
+              <a:rPr/>
               <a:t>あなたの職場で、認知バイアスが原因でヒヤリとした経験はありますか？</a:t>
             </a:r>
             <a:br/>
             <a:r>
+              <a:rPr/>
               <a:t>そのとき、どんな仕組みがあれば防げたと思いますか？</a:t>
             </a:r>
           </a:p>
@@ -9017,6 +9198,7 @@
               </a:defRPr>
             </a:pPr>
             <a:r>
+              <a:rPr/>
               <a:t>進め方</a:t>
             </a:r>
           </a:p>
@@ -9053,6 +9235,7 @@
               </a:defRPr>
             </a:pPr>
             <a:r>
+              <a:rPr/>
               <a:t>  1. 付箋に1人1つ書いて、グループ内で共有</a:t>
             </a:r>
           </a:p>
@@ -9089,6 +9272,7 @@
               </a:defRPr>
             </a:pPr>
             <a:r>
+              <a:rPr/>
               <a:t>  2. グループで「明日から試せそうなこと」を1つ選ぶ</a:t>
             </a:r>
           </a:p>
@@ -9125,6 +9309,7 @@
               </a:defRPr>
             </a:pPr>
             <a:r>
+              <a:rPr/>
               <a:t>  3. 各グループから1つずつ発表（共有 3分）</a:t>
             </a:r>
           </a:p>
@@ -9171,7 +9356,9 @@
           <a:bodyPr rtlCol="0" anchor="ctr"/>
           <a:lstStyle/>
           <a:p>
-            <a:pPr algn="ctr"/>
+            <a:pPr algn="ctr">
+              <a:defRPr/>
+            </a:pPr>
           </a:p>
         </p:txBody>
       </p:sp>
@@ -9206,10 +9393,12 @@
               </a:defRPr>
             </a:pPr>
             <a:r>
+              <a:rPr/>
               <a:t>ファシリテーターポイント: 誰が悪いではなくどんな仕組みが必要かに焦点。</a:t>
             </a:r>
             <a:br/>
             <a:r>
+              <a:rPr/>
               <a:t>小さなことでOK（申し送りの最後に「他にない？」を追加する等）</a:t>
             </a:r>
           </a:p>
